--- a/SIH2026-Baghewala-Digital-Twin.pptx
+++ b/SIH2026-Baghewala-Digital-Twin.pptx
@@ -5,14 +5,14 @@
     <p:sldMasterId id="2147483648" r:id="rId1"/>
   </p:sldMasterIdLst>
   <p:sldIdLst>
-    <p:sldId id="256" r:id="rId7"/>
-    <p:sldId id="257" r:id="rId8"/>
-    <p:sldId id="258" r:id="rId9"/>
-    <p:sldId id="259" r:id="rId10"/>
-    <p:sldId id="260" r:id="rId11"/>
-    <p:sldId id="261" r:id="rId12"/>
+    <p:sldId id="256" r:id="rId2"/>
+    <p:sldId id="257" r:id="rId3"/>
+    <p:sldId id="258" r:id="rId4"/>
+    <p:sldId id="259" r:id="rId5"/>
+    <p:sldId id="260" r:id="rId6"/>
+    <p:sldId id="261" r:id="rId7"/>
   </p:sldIdLst>
-  <p:sldSz cx="12191695" cy="6858000" type="screen4x3"/>
+  <p:sldSz cx="12192000" cy="6858000"/>
   <p:notesSz cx="6858000" cy="9144000"/>
   <p:defaultTextStyle>
     <a:defPPr>
@@ -109,6 +109,22 @@
       </a:defRPr>
     </a:lvl9pPr>
   </p:defaultTextStyle>
+  <p:extLst>
+    <p:ext uri="{EFAFB233-063F-42B5-8137-9DF3F51BA10A}">
+      <p15:sldGuideLst xmlns:p15="http://schemas.microsoft.com/office/powerpoint/2012/main">
+        <p15:guide id="1" orient="horz" pos="2160">
+          <p15:clr>
+            <a:srgbClr val="A4A3A4"/>
+          </p15:clr>
+        </p15:guide>
+        <p15:guide id="2" pos="2880">
+          <p15:clr>
+            <a:srgbClr val="A4A3A4"/>
+          </p15:clr>
+        </p15:guide>
+      </p15:sldGuideLst>
+    </p:ext>
+  </p:extLst>
 </p:presentation>
 </file>
 
@@ -150,10 +166,9 @@
           <a:lstStyle/>
           <a:p>
             <a:r>
-              <a:rPr lang="en-US" smtClean="0"/>
+              <a:rPr lang="en-US"/>
               <a:t>Click to edit Master title style</a:t>
             </a:r>
-            <a:endParaRPr lang="en-US"/>
           </a:p>
         </p:txBody>
       </p:sp>
@@ -269,10 +284,9 @@
           </a:lstStyle>
           <a:p>
             <a:r>
-              <a:rPr lang="en-US" smtClean="0"/>
+              <a:rPr lang="en-US"/>
               <a:t>Click to edit Master subtitle style</a:t>
             </a:r>
-            <a:endParaRPr lang="en-US"/>
           </a:p>
         </p:txBody>
       </p:sp>
@@ -293,7 +307,7 @@
           <a:p>
             <a:fld id="{5BCAD085-E8A6-8845-BD4E-CB4CCA059FC4}" type="datetimeFigureOut">
               <a:rPr lang="en-US" smtClean="0"/>
-              <a:t>1/27/13</a:t>
+              <a:t>8/25/2026</a:t>
             </a:fld>
             <a:endParaRPr lang="en-US"/>
           </a:p>
@@ -387,10 +401,9 @@
           <a:lstStyle/>
           <a:p>
             <a:r>
-              <a:rPr lang="en-US" smtClean="0"/>
+              <a:rPr lang="en-US"/>
               <a:t>Click to edit Master title style</a:t>
             </a:r>
-            <a:endParaRPr lang="en-US"/>
           </a:p>
         </p:txBody>
       </p:sp>
@@ -411,38 +424,37 @@
           <a:p>
             <a:pPr lvl="0"/>
             <a:r>
-              <a:rPr lang="en-US" smtClean="0"/>
+              <a:rPr lang="en-US"/>
               <a:t>Click to edit Master text styles</a:t>
             </a:r>
           </a:p>
           <a:p>
             <a:pPr lvl="1"/>
             <a:r>
-              <a:rPr lang="en-US" smtClean="0"/>
+              <a:rPr lang="en-US"/>
               <a:t>Second level</a:t>
             </a:r>
           </a:p>
           <a:p>
             <a:pPr lvl="2"/>
             <a:r>
-              <a:rPr lang="en-US" smtClean="0"/>
+              <a:rPr lang="en-US"/>
               <a:t>Third level</a:t>
             </a:r>
           </a:p>
           <a:p>
             <a:pPr lvl="3"/>
             <a:r>
-              <a:rPr lang="en-US" smtClean="0"/>
+              <a:rPr lang="en-US"/>
               <a:t>Fourth level</a:t>
             </a:r>
           </a:p>
           <a:p>
             <a:pPr lvl="4"/>
             <a:r>
-              <a:rPr lang="en-US" smtClean="0"/>
+              <a:rPr lang="en-US"/>
               <a:t>Fifth level</a:t>
             </a:r>
-            <a:endParaRPr lang="en-US"/>
           </a:p>
         </p:txBody>
       </p:sp>
@@ -463,7 +475,7 @@
           <a:p>
             <a:fld id="{5BCAD085-E8A6-8845-BD4E-CB4CCA059FC4}" type="datetimeFigureOut">
               <a:rPr lang="en-US" smtClean="0"/>
-              <a:t>1/27/13</a:t>
+              <a:t>8/25/2026</a:t>
             </a:fld>
             <a:endParaRPr lang="en-US"/>
           </a:p>
@@ -562,10 +574,9 @@
           <a:lstStyle/>
           <a:p>
             <a:r>
-              <a:rPr lang="en-US" smtClean="0"/>
+              <a:rPr lang="en-US"/>
               <a:t>Click to edit Master title style</a:t>
             </a:r>
-            <a:endParaRPr lang="en-US"/>
           </a:p>
         </p:txBody>
       </p:sp>
@@ -591,38 +602,37 @@
           <a:p>
             <a:pPr lvl="0"/>
             <a:r>
-              <a:rPr lang="en-US" smtClean="0"/>
+              <a:rPr lang="en-US"/>
               <a:t>Click to edit Master text styles</a:t>
             </a:r>
           </a:p>
           <a:p>
             <a:pPr lvl="1"/>
             <a:r>
-              <a:rPr lang="en-US" smtClean="0"/>
+              <a:rPr lang="en-US"/>
               <a:t>Second level</a:t>
             </a:r>
           </a:p>
           <a:p>
             <a:pPr lvl="2"/>
             <a:r>
-              <a:rPr lang="en-US" smtClean="0"/>
+              <a:rPr lang="en-US"/>
               <a:t>Third level</a:t>
             </a:r>
           </a:p>
           <a:p>
             <a:pPr lvl="3"/>
             <a:r>
-              <a:rPr lang="en-US" smtClean="0"/>
+              <a:rPr lang="en-US"/>
               <a:t>Fourth level</a:t>
             </a:r>
           </a:p>
           <a:p>
             <a:pPr lvl="4"/>
             <a:r>
-              <a:rPr lang="en-US" smtClean="0"/>
+              <a:rPr lang="en-US"/>
               <a:t>Fifth level</a:t>
             </a:r>
-            <a:endParaRPr lang="en-US"/>
           </a:p>
         </p:txBody>
       </p:sp>
@@ -643,7 +653,7 @@
           <a:p>
             <a:fld id="{5BCAD085-E8A6-8845-BD4E-CB4CCA059FC4}" type="datetimeFigureOut">
               <a:rPr lang="en-US" smtClean="0"/>
-              <a:t>1/27/13</a:t>
+              <a:t>8/25/2026</a:t>
             </a:fld>
             <a:endParaRPr lang="en-US"/>
           </a:p>
@@ -737,10 +747,9 @@
           <a:lstStyle/>
           <a:p>
             <a:r>
-              <a:rPr lang="en-US" smtClean="0"/>
+              <a:rPr lang="en-US"/>
               <a:t>Click to edit Master title style</a:t>
             </a:r>
-            <a:endParaRPr lang="en-US"/>
           </a:p>
         </p:txBody>
       </p:sp>
@@ -761,38 +770,37 @@
           <a:p>
             <a:pPr lvl="0"/>
             <a:r>
-              <a:rPr lang="en-US" smtClean="0"/>
+              <a:rPr lang="en-US"/>
               <a:t>Click to edit Master text styles</a:t>
             </a:r>
           </a:p>
           <a:p>
             <a:pPr lvl="1"/>
             <a:r>
-              <a:rPr lang="en-US" smtClean="0"/>
+              <a:rPr lang="en-US"/>
               <a:t>Second level</a:t>
             </a:r>
           </a:p>
           <a:p>
             <a:pPr lvl="2"/>
             <a:r>
-              <a:rPr lang="en-US" smtClean="0"/>
+              <a:rPr lang="en-US"/>
               <a:t>Third level</a:t>
             </a:r>
           </a:p>
           <a:p>
             <a:pPr lvl="3"/>
             <a:r>
-              <a:rPr lang="en-US" smtClean="0"/>
+              <a:rPr lang="en-US"/>
               <a:t>Fourth level</a:t>
             </a:r>
           </a:p>
           <a:p>
             <a:pPr lvl="4"/>
             <a:r>
-              <a:rPr lang="en-US" smtClean="0"/>
+              <a:rPr lang="en-US"/>
               <a:t>Fifth level</a:t>
             </a:r>
-            <a:endParaRPr lang="en-US"/>
           </a:p>
         </p:txBody>
       </p:sp>
@@ -813,7 +821,7 @@
           <a:p>
             <a:fld id="{5BCAD085-E8A6-8845-BD4E-CB4CCA059FC4}" type="datetimeFigureOut">
               <a:rPr lang="en-US" smtClean="0"/>
-              <a:t>1/27/13</a:t>
+              <a:t>8/25/2026</a:t>
             </a:fld>
             <a:endParaRPr lang="en-US"/>
           </a:p>
@@ -916,10 +924,9 @@
           </a:lstStyle>
           <a:p>
             <a:r>
-              <a:rPr lang="en-US" smtClean="0"/>
+              <a:rPr lang="en-US"/>
               <a:t>Click to edit Master title style</a:t>
             </a:r>
-            <a:endParaRPr lang="en-US"/>
           </a:p>
         </p:txBody>
       </p:sp>
@@ -1036,7 +1043,7 @@
           <a:p>
             <a:pPr lvl="0"/>
             <a:r>
-              <a:rPr lang="en-US" smtClean="0"/>
+              <a:rPr lang="en-US"/>
               <a:t>Click to edit Master text styles</a:t>
             </a:r>
           </a:p>
@@ -1059,7 +1066,7 @@
           <a:p>
             <a:fld id="{5BCAD085-E8A6-8845-BD4E-CB4CCA059FC4}" type="datetimeFigureOut">
               <a:rPr lang="en-US" smtClean="0"/>
-              <a:t>1/27/13</a:t>
+              <a:t>8/25/2026</a:t>
             </a:fld>
             <a:endParaRPr lang="en-US"/>
           </a:p>
@@ -1153,10 +1160,9 @@
           <a:lstStyle/>
           <a:p>
             <a:r>
-              <a:rPr lang="en-US" smtClean="0"/>
+              <a:rPr lang="en-US"/>
               <a:t>Click to edit Master title style</a:t>
             </a:r>
-            <a:endParaRPr lang="en-US"/>
           </a:p>
         </p:txBody>
       </p:sp>
@@ -1210,38 +1216,37 @@
           <a:p>
             <a:pPr lvl="0"/>
             <a:r>
-              <a:rPr lang="en-US" smtClean="0"/>
+              <a:rPr lang="en-US"/>
               <a:t>Click to edit Master text styles</a:t>
             </a:r>
           </a:p>
           <a:p>
             <a:pPr lvl="1"/>
             <a:r>
-              <a:rPr lang="en-US" smtClean="0"/>
+              <a:rPr lang="en-US"/>
               <a:t>Second level</a:t>
             </a:r>
           </a:p>
           <a:p>
             <a:pPr lvl="2"/>
             <a:r>
-              <a:rPr lang="en-US" smtClean="0"/>
+              <a:rPr lang="en-US"/>
               <a:t>Third level</a:t>
             </a:r>
           </a:p>
           <a:p>
             <a:pPr lvl="3"/>
             <a:r>
-              <a:rPr lang="en-US" smtClean="0"/>
+              <a:rPr lang="en-US"/>
               <a:t>Fourth level</a:t>
             </a:r>
           </a:p>
           <a:p>
             <a:pPr lvl="4"/>
             <a:r>
-              <a:rPr lang="en-US" smtClean="0"/>
+              <a:rPr lang="en-US"/>
               <a:t>Fifth level</a:t>
             </a:r>
-            <a:endParaRPr lang="en-US"/>
           </a:p>
         </p:txBody>
       </p:sp>
@@ -1295,38 +1300,37 @@
           <a:p>
             <a:pPr lvl="0"/>
             <a:r>
-              <a:rPr lang="en-US" smtClean="0"/>
+              <a:rPr lang="en-US"/>
               <a:t>Click to edit Master text styles</a:t>
             </a:r>
           </a:p>
           <a:p>
             <a:pPr lvl="1"/>
             <a:r>
-              <a:rPr lang="en-US" smtClean="0"/>
+              <a:rPr lang="en-US"/>
               <a:t>Second level</a:t>
             </a:r>
           </a:p>
           <a:p>
             <a:pPr lvl="2"/>
             <a:r>
-              <a:rPr lang="en-US" smtClean="0"/>
+              <a:rPr lang="en-US"/>
               <a:t>Third level</a:t>
             </a:r>
           </a:p>
           <a:p>
             <a:pPr lvl="3"/>
             <a:r>
-              <a:rPr lang="en-US" smtClean="0"/>
+              <a:rPr lang="en-US"/>
               <a:t>Fourth level</a:t>
             </a:r>
           </a:p>
           <a:p>
             <a:pPr lvl="4"/>
             <a:r>
-              <a:rPr lang="en-US" smtClean="0"/>
+              <a:rPr lang="en-US"/>
               <a:t>Fifth level</a:t>
             </a:r>
-            <a:endParaRPr lang="en-US"/>
           </a:p>
         </p:txBody>
       </p:sp>
@@ -1347,7 +1351,7 @@
           <a:p>
             <a:fld id="{5BCAD085-E8A6-8845-BD4E-CB4CCA059FC4}" type="datetimeFigureOut">
               <a:rPr lang="en-US" smtClean="0"/>
-              <a:t>1/27/13</a:t>
+              <a:t>8/25/2026</a:t>
             </a:fld>
             <a:endParaRPr lang="en-US"/>
           </a:p>
@@ -1445,10 +1449,9 @@
           </a:lstStyle>
           <a:p>
             <a:r>
-              <a:rPr lang="en-US" smtClean="0"/>
+              <a:rPr lang="en-US"/>
               <a:t>Click to edit Master title style</a:t>
             </a:r>
-            <a:endParaRPr lang="en-US"/>
           </a:p>
         </p:txBody>
       </p:sp>
@@ -1511,7 +1514,7 @@
           <a:p>
             <a:pPr lvl="0"/>
             <a:r>
-              <a:rPr lang="en-US" smtClean="0"/>
+              <a:rPr lang="en-US"/>
               <a:t>Click to edit Master text styles</a:t>
             </a:r>
           </a:p>
@@ -1567,38 +1570,37 @@
           <a:p>
             <a:pPr lvl="0"/>
             <a:r>
-              <a:rPr lang="en-US" smtClean="0"/>
+              <a:rPr lang="en-US"/>
               <a:t>Click to edit Master text styles</a:t>
             </a:r>
           </a:p>
           <a:p>
             <a:pPr lvl="1"/>
             <a:r>
-              <a:rPr lang="en-US" smtClean="0"/>
+              <a:rPr lang="en-US"/>
               <a:t>Second level</a:t>
             </a:r>
           </a:p>
           <a:p>
             <a:pPr lvl="2"/>
             <a:r>
-              <a:rPr lang="en-US" smtClean="0"/>
+              <a:rPr lang="en-US"/>
               <a:t>Third level</a:t>
             </a:r>
           </a:p>
           <a:p>
             <a:pPr lvl="3"/>
             <a:r>
-              <a:rPr lang="en-US" smtClean="0"/>
+              <a:rPr lang="en-US"/>
               <a:t>Fourth level</a:t>
             </a:r>
           </a:p>
           <a:p>
             <a:pPr lvl="4"/>
             <a:r>
-              <a:rPr lang="en-US" smtClean="0"/>
+              <a:rPr lang="en-US"/>
               <a:t>Fifth level</a:t>
             </a:r>
-            <a:endParaRPr lang="en-US"/>
           </a:p>
         </p:txBody>
       </p:sp>
@@ -1661,7 +1663,7 @@
           <a:p>
             <a:pPr lvl="0"/>
             <a:r>
-              <a:rPr lang="en-US" smtClean="0"/>
+              <a:rPr lang="en-US"/>
               <a:t>Click to edit Master text styles</a:t>
             </a:r>
           </a:p>
@@ -1717,38 +1719,37 @@
           <a:p>
             <a:pPr lvl="0"/>
             <a:r>
-              <a:rPr lang="en-US" smtClean="0"/>
+              <a:rPr lang="en-US"/>
               <a:t>Click to edit Master text styles</a:t>
             </a:r>
           </a:p>
           <a:p>
             <a:pPr lvl="1"/>
             <a:r>
-              <a:rPr lang="en-US" smtClean="0"/>
+              <a:rPr lang="en-US"/>
               <a:t>Second level</a:t>
             </a:r>
           </a:p>
           <a:p>
             <a:pPr lvl="2"/>
             <a:r>
-              <a:rPr lang="en-US" smtClean="0"/>
+              <a:rPr lang="en-US"/>
               <a:t>Third level</a:t>
             </a:r>
           </a:p>
           <a:p>
             <a:pPr lvl="3"/>
             <a:r>
-              <a:rPr lang="en-US" smtClean="0"/>
+              <a:rPr lang="en-US"/>
               <a:t>Fourth level</a:t>
             </a:r>
           </a:p>
           <a:p>
             <a:pPr lvl="4"/>
             <a:r>
-              <a:rPr lang="en-US" smtClean="0"/>
+              <a:rPr lang="en-US"/>
               <a:t>Fifth level</a:t>
             </a:r>
-            <a:endParaRPr lang="en-US"/>
           </a:p>
         </p:txBody>
       </p:sp>
@@ -1769,7 +1770,7 @@
           <a:p>
             <a:fld id="{5BCAD085-E8A6-8845-BD4E-CB4CCA059FC4}" type="datetimeFigureOut">
               <a:rPr lang="en-US" smtClean="0"/>
-              <a:t>1/27/13</a:t>
+              <a:t>8/25/2026</a:t>
             </a:fld>
             <a:endParaRPr lang="en-US"/>
           </a:p>
@@ -1863,10 +1864,9 @@
           <a:lstStyle/>
           <a:p>
             <a:r>
-              <a:rPr lang="en-US" smtClean="0"/>
+              <a:rPr lang="en-US"/>
               <a:t>Click to edit Master title style</a:t>
             </a:r>
-            <a:endParaRPr lang="en-US"/>
           </a:p>
         </p:txBody>
       </p:sp>
@@ -1887,7 +1887,7 @@
           <a:p>
             <a:fld id="{5BCAD085-E8A6-8845-BD4E-CB4CCA059FC4}" type="datetimeFigureOut">
               <a:rPr lang="en-US" smtClean="0"/>
-              <a:t>1/27/13</a:t>
+              <a:t>8/25/2026</a:t>
             </a:fld>
             <a:endParaRPr lang="en-US"/>
           </a:p>
@@ -1982,7 +1982,7 @@
           <a:p>
             <a:fld id="{5BCAD085-E8A6-8845-BD4E-CB4CCA059FC4}" type="datetimeFigureOut">
               <a:rPr lang="en-US" smtClean="0"/>
-              <a:t>1/27/13</a:t>
+              <a:t>8/25/2026</a:t>
             </a:fld>
             <a:endParaRPr lang="en-US"/>
           </a:p>
@@ -2085,10 +2085,9 @@
           </a:lstStyle>
           <a:p>
             <a:r>
-              <a:rPr lang="en-US" smtClean="0"/>
+              <a:rPr lang="en-US"/>
               <a:t>Click to edit Master title style</a:t>
             </a:r>
-            <a:endParaRPr lang="en-US"/>
           </a:p>
         </p:txBody>
       </p:sp>
@@ -2142,38 +2141,37 @@
           <a:p>
             <a:pPr lvl="0"/>
             <a:r>
-              <a:rPr lang="en-US" smtClean="0"/>
+              <a:rPr lang="en-US"/>
               <a:t>Click to edit Master text styles</a:t>
             </a:r>
           </a:p>
           <a:p>
             <a:pPr lvl="1"/>
             <a:r>
-              <a:rPr lang="en-US" smtClean="0"/>
+              <a:rPr lang="en-US"/>
               <a:t>Second level</a:t>
             </a:r>
           </a:p>
           <a:p>
             <a:pPr lvl="2"/>
             <a:r>
-              <a:rPr lang="en-US" smtClean="0"/>
+              <a:rPr lang="en-US"/>
               <a:t>Third level</a:t>
             </a:r>
           </a:p>
           <a:p>
             <a:pPr lvl="3"/>
             <a:r>
-              <a:rPr lang="en-US" smtClean="0"/>
+              <a:rPr lang="en-US"/>
               <a:t>Fourth level</a:t>
             </a:r>
           </a:p>
           <a:p>
             <a:pPr lvl="4"/>
             <a:r>
-              <a:rPr lang="en-US" smtClean="0"/>
+              <a:rPr lang="en-US"/>
               <a:t>Fifth level</a:t>
             </a:r>
-            <a:endParaRPr lang="en-US"/>
           </a:p>
         </p:txBody>
       </p:sp>
@@ -2236,7 +2234,7 @@
           <a:p>
             <a:pPr lvl="0"/>
             <a:r>
-              <a:rPr lang="en-US" smtClean="0"/>
+              <a:rPr lang="en-US"/>
               <a:t>Click to edit Master text styles</a:t>
             </a:r>
           </a:p>
@@ -2259,7 +2257,7 @@
           <a:p>
             <a:fld id="{5BCAD085-E8A6-8845-BD4E-CB4CCA059FC4}" type="datetimeFigureOut">
               <a:rPr lang="en-US" smtClean="0"/>
-              <a:t>1/27/13</a:t>
+              <a:t>8/25/2026</a:t>
             </a:fld>
             <a:endParaRPr lang="en-US"/>
           </a:p>
@@ -2362,10 +2360,9 @@
           </a:lstStyle>
           <a:p>
             <a:r>
-              <a:rPr lang="en-US" smtClean="0"/>
+              <a:rPr lang="en-US"/>
               <a:t>Click to edit Master title style</a:t>
             </a:r>
-            <a:endParaRPr lang="en-US"/>
           </a:p>
         </p:txBody>
       </p:sp>
@@ -2489,7 +2486,7 @@
           <a:p>
             <a:pPr lvl="0"/>
             <a:r>
-              <a:rPr lang="en-US" smtClean="0"/>
+              <a:rPr lang="en-US"/>
               <a:t>Click to edit Master text styles</a:t>
             </a:r>
           </a:p>
@@ -2512,7 +2509,7 @@
           <a:p>
             <a:fld id="{5BCAD085-E8A6-8845-BD4E-CB4CCA059FC4}" type="datetimeFigureOut">
               <a:rPr lang="en-US" smtClean="0"/>
-              <a:t>1/27/13</a:t>
+              <a:t>8/25/2026</a:t>
             </a:fld>
             <a:endParaRPr lang="en-US"/>
           </a:p>
@@ -2621,10 +2618,9 @@
           <a:lstStyle/>
           <a:p>
             <a:r>
-              <a:rPr lang="en-US" smtClean="0"/>
+              <a:rPr lang="en-US"/>
               <a:t>Click to edit Master title style</a:t>
             </a:r>
-            <a:endParaRPr lang="en-US"/>
           </a:p>
         </p:txBody>
       </p:sp>
@@ -2655,38 +2651,37 @@
           <a:p>
             <a:pPr lvl="0"/>
             <a:r>
-              <a:rPr lang="en-US" smtClean="0"/>
+              <a:rPr lang="en-US"/>
               <a:t>Click to edit Master text styles</a:t>
             </a:r>
           </a:p>
           <a:p>
             <a:pPr lvl="1"/>
             <a:r>
-              <a:rPr lang="en-US" smtClean="0"/>
+              <a:rPr lang="en-US"/>
               <a:t>Second level</a:t>
             </a:r>
           </a:p>
           <a:p>
             <a:pPr lvl="2"/>
             <a:r>
-              <a:rPr lang="en-US" smtClean="0"/>
+              <a:rPr lang="en-US"/>
               <a:t>Third level</a:t>
             </a:r>
           </a:p>
           <a:p>
             <a:pPr lvl="3"/>
             <a:r>
-              <a:rPr lang="en-US" smtClean="0"/>
+              <a:rPr lang="en-US"/>
               <a:t>Fourth level</a:t>
             </a:r>
           </a:p>
           <a:p>
             <a:pPr lvl="4"/>
             <a:r>
-              <a:rPr lang="en-US" smtClean="0"/>
+              <a:rPr lang="en-US"/>
               <a:t>Fifth level</a:t>
             </a:r>
-            <a:endParaRPr lang="en-US"/>
           </a:p>
         </p:txBody>
       </p:sp>
@@ -2725,7 +2720,7 @@
           <a:p>
             <a:fld id="{5BCAD085-E8A6-8845-BD4E-CB4CCA059FC4}" type="datetimeFigureOut">
               <a:rPr lang="en-US" smtClean="0"/>
-              <a:t>1/27/13</a:t>
+              <a:t>8/25/2026</a:t>
             </a:fld>
             <a:endParaRPr lang="en-US"/>
           </a:p>
@@ -3084,7 +3079,7 @@
 </file>
 
 <file path=ppt/slides/slide1.xml><?xml version="1.0" encoding="utf-8"?>
-<p:sld xmlns:a="http://schemas.openxmlformats.org/drawingml/2006/main" xmlns:p="http://schemas.openxmlformats.org/presentationml/2006/main" xmlns:r="http://schemas.openxmlformats.org/officeDocument/2006/relationships">
+<p:sld xmlns:a="http://schemas.openxmlformats.org/drawingml/2006/main" xmlns:r="http://schemas.openxmlformats.org/officeDocument/2006/relationships" xmlns:p="http://schemas.openxmlformats.org/presentationml/2006/main">
   <p:cSld>
     <p:spTree>
       <p:nvGrpSpPr>
@@ -3092,7 +3087,14 @@
         <p:cNvGrpSpPr/>
         <p:nvPr/>
       </p:nvGrpSpPr>
-      <p:grpSpPr/>
+      <p:grpSpPr>
+        <a:xfrm>
+          <a:off x="0" y="0"/>
+          <a:ext cx="0" cy="0"/>
+          <a:chOff x="0" y="0"/>
+          <a:chExt cx="0" cy="0"/>
+        </a:xfrm>
+      </p:grpSpPr>
       <p:sp>
         <p:nvSpPr>
           <p:cNvPr id="2" name="Rectangle 1"/>
@@ -3101,7 +3103,7 @@
         </p:nvSpPr>
         <p:spPr>
           <a:xfrm>
-            <a:off x="0" y="0"/>
+            <a:off x="-1" y="0"/>
             <a:ext cx="12191695" cy="6858000"/>
           </a:xfrm>
           <a:prstGeom prst="rect">
@@ -3133,6 +3135,7 @@
           <a:lstStyle/>
           <a:p>
             <a:pPr algn="ctr"/>
+            <a:endParaRPr dirty="0"/>
           </a:p>
         </p:txBody>
       </p:sp>
@@ -3178,6 +3181,7 @@
           <a:lstStyle/>
           <a:p>
             <a:pPr algn="ctr"/>
+            <a:endParaRPr/>
           </a:p>
         </p:txBody>
       </p:sp>
@@ -3189,7 +3193,7 @@
         </p:nvSpPr>
         <p:spPr>
           <a:xfrm>
-            <a:off x="960120" y="685800"/>
+            <a:off x="1005840" y="1078992"/>
             <a:ext cx="10271455" cy="1783080"/>
           </a:xfrm>
           <a:prstGeom prst="rect">
@@ -3209,7 +3213,7 @@
               </a:spcAft>
             </a:pPr>
             <a:r>
-              <a:rPr sz="1050" b="1">
+              <a:rPr sz="1050" b="1" dirty="0">
                 <a:solidFill>
                   <a:srgbClr val="00D2FF"/>
                 </a:solidFill>
@@ -3225,7 +3229,7 @@
               </a:spcAft>
             </a:pPr>
             <a:r>
-              <a:rPr sz="2200" b="1">
+              <a:rPr sz="2200" b="1" dirty="0">
                 <a:solidFill>
                   <a:srgbClr val="FFFFFF"/>
                 </a:solidFill>
@@ -3236,7 +3240,7 @@
           </a:p>
           <a:p>
             <a:r>
-              <a:rPr sz="1150">
+              <a:rPr sz="1150" dirty="0">
                 <a:solidFill>
                   <a:srgbClr val="94A3B8"/>
                 </a:solidFill>
@@ -3289,6 +3293,7 @@
           <a:lstStyle/>
           <a:p>
             <a:pPr algn="ctr"/>
+            <a:endParaRPr/>
           </a:p>
         </p:txBody>
       </p:sp>
@@ -3485,6 +3490,7 @@
           <a:lstStyle/>
           <a:p>
             <a:pPr algn="ctr"/>
+            <a:endParaRPr/>
           </a:p>
         </p:txBody>
       </p:sp>
@@ -3681,6 +3687,7 @@
           <a:lstStyle/>
           <a:p>
             <a:pPr algn="ctr"/>
+            <a:endParaRPr/>
           </a:p>
         </p:txBody>
       </p:sp>
@@ -3877,6 +3884,7 @@
           <a:lstStyle/>
           <a:p>
             <a:pPr algn="ctr"/>
+            <a:endParaRPr/>
           </a:p>
         </p:txBody>
       </p:sp>
@@ -4040,7 +4048,7 @@
 </file>
 
 <file path=ppt/slides/slide2.xml><?xml version="1.0" encoding="utf-8"?>
-<p:sld xmlns:a="http://schemas.openxmlformats.org/drawingml/2006/main" xmlns:p="http://schemas.openxmlformats.org/presentationml/2006/main" xmlns:r="http://schemas.openxmlformats.org/officeDocument/2006/relationships">
+<p:sld xmlns:a="http://schemas.openxmlformats.org/drawingml/2006/main" xmlns:r="http://schemas.openxmlformats.org/officeDocument/2006/relationships" xmlns:p="http://schemas.openxmlformats.org/presentationml/2006/main">
   <p:cSld>
     <p:spTree>
       <p:nvGrpSpPr>
@@ -4048,7 +4056,14 @@
         <p:cNvGrpSpPr/>
         <p:nvPr/>
       </p:nvGrpSpPr>
-      <p:grpSpPr/>
+      <p:grpSpPr>
+        <a:xfrm>
+          <a:off x="0" y="0"/>
+          <a:ext cx="0" cy="0"/>
+          <a:chOff x="0" y="0"/>
+          <a:chExt cx="0" cy="0"/>
+        </a:xfrm>
+      </p:grpSpPr>
       <p:sp>
         <p:nvSpPr>
           <p:cNvPr id="2" name="Rectangle 1"/>
@@ -4089,6 +4104,7 @@
           <a:lstStyle/>
           <a:p>
             <a:pPr algn="ctr"/>
+            <a:endParaRPr/>
           </a:p>
         </p:txBody>
       </p:sp>
@@ -4240,6 +4256,7 @@
           <a:lstStyle/>
           <a:p>
             <a:pPr algn="ctr"/>
+            <a:endParaRPr/>
           </a:p>
         </p:txBody>
       </p:sp>
@@ -4285,6 +4302,7 @@
           <a:lstStyle/>
           <a:p>
             <a:pPr algn="ctr"/>
+            <a:endParaRPr/>
           </a:p>
         </p:txBody>
       </p:sp>
@@ -4509,6 +4527,7 @@
           <a:lstStyle/>
           <a:p>
             <a:pPr algn="ctr"/>
+            <a:endParaRPr/>
           </a:p>
         </p:txBody>
       </p:sp>
@@ -4733,6 +4752,7 @@
           <a:lstStyle/>
           <a:p>
             <a:pPr algn="ctr"/>
+            <a:endParaRPr/>
           </a:p>
         </p:txBody>
       </p:sp>
@@ -4924,7 +4944,7 @@
 </file>
 
 <file path=ppt/slides/slide3.xml><?xml version="1.0" encoding="utf-8"?>
-<p:sld xmlns:a="http://schemas.openxmlformats.org/drawingml/2006/main" xmlns:p="http://schemas.openxmlformats.org/presentationml/2006/main" xmlns:r="http://schemas.openxmlformats.org/officeDocument/2006/relationships">
+<p:sld xmlns:a="http://schemas.openxmlformats.org/drawingml/2006/main" xmlns:r="http://schemas.openxmlformats.org/officeDocument/2006/relationships" xmlns:p="http://schemas.openxmlformats.org/presentationml/2006/main">
   <p:cSld>
     <p:spTree>
       <p:nvGrpSpPr>
@@ -4932,7 +4952,14 @@
         <p:cNvGrpSpPr/>
         <p:nvPr/>
       </p:nvGrpSpPr>
-      <p:grpSpPr/>
+      <p:grpSpPr>
+        <a:xfrm>
+          <a:off x="0" y="0"/>
+          <a:ext cx="0" cy="0"/>
+          <a:chOff x="0" y="0"/>
+          <a:chExt cx="0" cy="0"/>
+        </a:xfrm>
+      </p:grpSpPr>
       <p:sp>
         <p:nvSpPr>
           <p:cNvPr id="2" name="Rectangle 1"/>
@@ -4973,6 +5000,7 @@
           <a:lstStyle/>
           <a:p>
             <a:pPr algn="ctr"/>
+            <a:endParaRPr/>
           </a:p>
         </p:txBody>
       </p:sp>
@@ -5124,6 +5152,7 @@
           <a:lstStyle/>
           <a:p>
             <a:pPr algn="ctr"/>
+            <a:endParaRPr/>
           </a:p>
         </p:txBody>
       </p:sp>
@@ -5169,6 +5198,7 @@
           <a:lstStyle/>
           <a:p>
             <a:pPr algn="ctr"/>
+            <a:endParaRPr/>
           </a:p>
         </p:txBody>
       </p:sp>
@@ -5210,7 +5240,7 @@
           </a:fontRef>
         </p:style>
         <p:txBody>
-          <a:bodyPr rtlCol="0" anchor="ctr" wrap="square" lIns="0" tIns="0" rIns="0" bIns="0"/>
+          <a:bodyPr wrap="square" lIns="0" tIns="0" rIns="0" bIns="0" rtlCol="0" anchor="ctr"/>
           <a:lstStyle/>
           <a:p>
             <a:pPr algn="ctr"/>
@@ -5413,6 +5443,7 @@
           <a:lstStyle/>
           <a:p>
             <a:pPr algn="ctr"/>
+            <a:endParaRPr/>
           </a:p>
         </p:txBody>
       </p:sp>
@@ -5458,6 +5489,7 @@
           <a:lstStyle/>
           <a:p>
             <a:pPr algn="ctr"/>
+            <a:endParaRPr/>
           </a:p>
         </p:txBody>
       </p:sp>
@@ -5499,7 +5531,7 @@
           </a:fontRef>
         </p:style>
         <p:txBody>
-          <a:bodyPr rtlCol="0" anchor="ctr" wrap="square" lIns="0" tIns="0" rIns="0" bIns="0"/>
+          <a:bodyPr wrap="square" lIns="0" tIns="0" rIns="0" bIns="0" rtlCol="0" anchor="ctr"/>
           <a:lstStyle/>
           <a:p>
             <a:pPr algn="ctr"/>
@@ -5702,6 +5734,7 @@
           <a:lstStyle/>
           <a:p>
             <a:pPr algn="ctr"/>
+            <a:endParaRPr/>
           </a:p>
         </p:txBody>
       </p:sp>
@@ -5747,6 +5780,7 @@
           <a:lstStyle/>
           <a:p>
             <a:pPr algn="ctr"/>
+            <a:endParaRPr/>
           </a:p>
         </p:txBody>
       </p:sp>
@@ -5788,7 +5822,7 @@
           </a:fontRef>
         </p:style>
         <p:txBody>
-          <a:bodyPr rtlCol="0" anchor="ctr" wrap="square" lIns="0" tIns="0" rIns="0" bIns="0"/>
+          <a:bodyPr wrap="square" lIns="0" tIns="0" rIns="0" bIns="0" rtlCol="0" anchor="ctr"/>
           <a:lstStyle/>
           <a:p>
             <a:pPr algn="ctr"/>
@@ -5991,6 +6025,7 @@
           <a:lstStyle/>
           <a:p>
             <a:pPr algn="ctr"/>
+            <a:endParaRPr/>
           </a:p>
         </p:txBody>
       </p:sp>
@@ -6036,6 +6071,7 @@
           <a:lstStyle/>
           <a:p>
             <a:pPr algn="ctr"/>
+            <a:endParaRPr/>
           </a:p>
         </p:txBody>
       </p:sp>
@@ -6077,7 +6113,7 @@
           </a:fontRef>
         </p:style>
         <p:txBody>
-          <a:bodyPr rtlCol="0" anchor="ctr" wrap="square" lIns="0" tIns="0" rIns="0" bIns="0"/>
+          <a:bodyPr wrap="square" lIns="0" tIns="0" rIns="0" bIns="0" rtlCol="0" anchor="ctr"/>
           <a:lstStyle/>
           <a:p>
             <a:pPr algn="ctr"/>
@@ -6280,6 +6316,7 @@
           <a:lstStyle/>
           <a:p>
             <a:pPr algn="ctr"/>
+            <a:endParaRPr/>
           </a:p>
         </p:txBody>
       </p:sp>
@@ -6325,6 +6362,7 @@
           <a:lstStyle/>
           <a:p>
             <a:pPr algn="ctr"/>
+            <a:endParaRPr/>
           </a:p>
         </p:txBody>
       </p:sp>
@@ -6366,7 +6404,7 @@
           </a:fontRef>
         </p:style>
         <p:txBody>
-          <a:bodyPr rtlCol="0" anchor="ctr" wrap="square" lIns="0" tIns="0" rIns="0" bIns="0"/>
+          <a:bodyPr wrap="square" lIns="0" tIns="0" rIns="0" bIns="0" rtlCol="0" anchor="ctr"/>
           <a:lstStyle/>
           <a:p>
             <a:pPr algn="ctr"/>
@@ -6571,6 +6609,7 @@
           <a:lstStyle/>
           <a:p>
             <a:pPr algn="ctr"/>
+            <a:endParaRPr/>
           </a:p>
         </p:txBody>
       </p:sp>
@@ -6680,6 +6719,7 @@
           <a:lstStyle/>
           <a:p>
             <a:pPr algn="ctr"/>
+            <a:endParaRPr/>
           </a:p>
         </p:txBody>
       </p:sp>
@@ -6789,6 +6829,7 @@
           <a:lstStyle/>
           <a:p>
             <a:pPr algn="ctr"/>
+            <a:endParaRPr/>
           </a:p>
         </p:txBody>
       </p:sp>
@@ -6865,7 +6906,7 @@
 </file>
 
 <file path=ppt/slides/slide4.xml><?xml version="1.0" encoding="utf-8"?>
-<p:sld xmlns:a="http://schemas.openxmlformats.org/drawingml/2006/main" xmlns:p="http://schemas.openxmlformats.org/presentationml/2006/main" xmlns:r="http://schemas.openxmlformats.org/officeDocument/2006/relationships">
+<p:sld xmlns:a="http://schemas.openxmlformats.org/drawingml/2006/main" xmlns:r="http://schemas.openxmlformats.org/officeDocument/2006/relationships" xmlns:p="http://schemas.openxmlformats.org/presentationml/2006/main">
   <p:cSld>
     <p:spTree>
       <p:nvGrpSpPr>
@@ -6873,7 +6914,14 @@
         <p:cNvGrpSpPr/>
         <p:nvPr/>
       </p:nvGrpSpPr>
-      <p:grpSpPr/>
+      <p:grpSpPr>
+        <a:xfrm>
+          <a:off x="0" y="0"/>
+          <a:ext cx="0" cy="0"/>
+          <a:chOff x="0" y="0"/>
+          <a:chExt cx="0" cy="0"/>
+        </a:xfrm>
+      </p:grpSpPr>
       <p:sp>
         <p:nvSpPr>
           <p:cNvPr id="2" name="Rectangle 1"/>
@@ -6914,6 +6962,7 @@
           <a:lstStyle/>
           <a:p>
             <a:pPr algn="ctr"/>
+            <a:endParaRPr/>
           </a:p>
         </p:txBody>
       </p:sp>
@@ -7065,6 +7114,7 @@
           <a:lstStyle/>
           <a:p>
             <a:pPr algn="ctr"/>
+            <a:endParaRPr/>
           </a:p>
         </p:txBody>
       </p:sp>
@@ -7110,6 +7160,7 @@
           <a:lstStyle/>
           <a:p>
             <a:pPr algn="ctr"/>
+            <a:endParaRPr/>
           </a:p>
         </p:txBody>
       </p:sp>
@@ -7306,6 +7357,7 @@
           <a:lstStyle/>
           <a:p>
             <a:pPr algn="ctr"/>
+            <a:endParaRPr/>
           </a:p>
         </p:txBody>
       </p:sp>
@@ -7502,6 +7554,7 @@
           <a:lstStyle/>
           <a:p>
             <a:pPr algn="ctr"/>
+            <a:endParaRPr/>
           </a:p>
         </p:txBody>
       </p:sp>
@@ -7698,6 +7751,7 @@
           <a:lstStyle/>
           <a:p>
             <a:pPr algn="ctr"/>
+            <a:endParaRPr/>
           </a:p>
         </p:txBody>
       </p:sp>
@@ -7861,7 +7915,7 @@
 </file>
 
 <file path=ppt/slides/slide5.xml><?xml version="1.0" encoding="utf-8"?>
-<p:sld xmlns:a="http://schemas.openxmlformats.org/drawingml/2006/main" xmlns:p="http://schemas.openxmlformats.org/presentationml/2006/main" xmlns:r="http://schemas.openxmlformats.org/officeDocument/2006/relationships">
+<p:sld xmlns:a="http://schemas.openxmlformats.org/drawingml/2006/main" xmlns:r="http://schemas.openxmlformats.org/officeDocument/2006/relationships" xmlns:p="http://schemas.openxmlformats.org/presentationml/2006/main">
   <p:cSld>
     <p:spTree>
       <p:nvGrpSpPr>
@@ -7869,7 +7923,14 @@
         <p:cNvGrpSpPr/>
         <p:nvPr/>
       </p:nvGrpSpPr>
-      <p:grpSpPr/>
+      <p:grpSpPr>
+        <a:xfrm>
+          <a:off x="0" y="0"/>
+          <a:ext cx="0" cy="0"/>
+          <a:chOff x="0" y="0"/>
+          <a:chExt cx="0" cy="0"/>
+        </a:xfrm>
+      </p:grpSpPr>
       <p:sp>
         <p:nvSpPr>
           <p:cNvPr id="2" name="Rectangle 1"/>
@@ -7910,6 +7971,7 @@
           <a:lstStyle/>
           <a:p>
             <a:pPr algn="ctr"/>
+            <a:endParaRPr/>
           </a:p>
         </p:txBody>
       </p:sp>
@@ -8061,6 +8123,7 @@
           <a:lstStyle/>
           <a:p>
             <a:pPr algn="ctr"/>
+            <a:endParaRPr/>
           </a:p>
         </p:txBody>
       </p:sp>
@@ -8106,6 +8169,7 @@
           <a:lstStyle/>
           <a:p>
             <a:pPr algn="ctr"/>
+            <a:endParaRPr/>
           </a:p>
         </p:txBody>
       </p:sp>
@@ -8234,6 +8298,7 @@
           <a:lstStyle/>
           <a:p>
             <a:pPr algn="ctr"/>
+            <a:endParaRPr/>
           </a:p>
         </p:txBody>
       </p:sp>
@@ -8362,6 +8427,7 @@
           <a:lstStyle/>
           <a:p>
             <a:pPr algn="ctr"/>
+            <a:endParaRPr/>
           </a:p>
         </p:txBody>
       </p:sp>
@@ -8490,6 +8556,7 @@
           <a:lstStyle/>
           <a:p>
             <a:pPr algn="ctr"/>
+            <a:endParaRPr/>
           </a:p>
         </p:txBody>
       </p:sp>
@@ -8618,6 +8685,7 @@
           <a:lstStyle/>
           <a:p>
             <a:pPr algn="ctr"/>
+            <a:endParaRPr/>
           </a:p>
         </p:txBody>
       </p:sp>
@@ -8746,6 +8814,7 @@
           <a:lstStyle/>
           <a:p>
             <a:pPr algn="ctr"/>
+            <a:endParaRPr/>
           </a:p>
         </p:txBody>
       </p:sp>
@@ -8970,6 +9039,7 @@
           <a:lstStyle/>
           <a:p>
             <a:pPr algn="ctr"/>
+            <a:endParaRPr/>
           </a:p>
         </p:txBody>
       </p:sp>
@@ -9161,7 +9231,7 @@
 </file>
 
 <file path=ppt/slides/slide6.xml><?xml version="1.0" encoding="utf-8"?>
-<p:sld xmlns:a="http://schemas.openxmlformats.org/drawingml/2006/main" xmlns:p="http://schemas.openxmlformats.org/presentationml/2006/main" xmlns:r="http://schemas.openxmlformats.org/officeDocument/2006/relationships">
+<p:sld xmlns:a="http://schemas.openxmlformats.org/drawingml/2006/main" xmlns:r="http://schemas.openxmlformats.org/officeDocument/2006/relationships" xmlns:p="http://schemas.openxmlformats.org/presentationml/2006/main">
   <p:cSld>
     <p:spTree>
       <p:nvGrpSpPr>
@@ -9169,7 +9239,14 @@
         <p:cNvGrpSpPr/>
         <p:nvPr/>
       </p:nvGrpSpPr>
-      <p:grpSpPr/>
+      <p:grpSpPr>
+        <a:xfrm>
+          <a:off x="0" y="0"/>
+          <a:ext cx="0" cy="0"/>
+          <a:chOff x="0" y="0"/>
+          <a:chExt cx="0" cy="0"/>
+        </a:xfrm>
+      </p:grpSpPr>
       <p:sp>
         <p:nvSpPr>
           <p:cNvPr id="2" name="Rectangle 1"/>
@@ -9210,6 +9287,7 @@
           <a:lstStyle/>
           <a:p>
             <a:pPr algn="ctr"/>
+            <a:endParaRPr/>
           </a:p>
         </p:txBody>
       </p:sp>
@@ -9361,6 +9439,7 @@
           <a:lstStyle/>
           <a:p>
             <a:pPr algn="ctr"/>
+            <a:endParaRPr/>
           </a:p>
         </p:txBody>
       </p:sp>
@@ -9406,6 +9485,7 @@
           <a:lstStyle/>
           <a:p>
             <a:pPr algn="ctr"/>
+            <a:endParaRPr/>
           </a:p>
         </p:txBody>
       </p:sp>
@@ -9602,6 +9682,7 @@
           <a:lstStyle/>
           <a:p>
             <a:pPr algn="ctr"/>
+            <a:endParaRPr/>
           </a:p>
         </p:txBody>
       </p:sp>
@@ -9798,6 +9879,7 @@
           <a:lstStyle/>
           <a:p>
             <a:pPr algn="ctr"/>
+            <a:endParaRPr/>
           </a:p>
         </p:txBody>
       </p:sp>
@@ -9994,6 +10076,7 @@
           <a:lstStyle/>
           <a:p>
             <a:pPr algn="ctr"/>
+            <a:endParaRPr/>
           </a:p>
         </p:txBody>
       </p:sp>
